--- a/Schools_ML_Track/camp_2026/slides/ML/ML13.pptx
+++ b/Schools_ML_Track/camp_2026/slides/ML/ML13.pptx
@@ -127,7 +127,7 @@
   <p:extLst>
     <p:ext uri="{521415D9-36F7-43E2-AB2F-B90AF26B5E84}">
       <p14:sectionLst xmlns:p14="http://schemas.microsoft.com/office/powerpoint/2010/main">
-        <p14:section name="Opening" id="{726e40b1-a3cf-d5c4-d87e-2fd54ec1cc4f}">
+        <p14:section name="Opening" id="{7bfb306d-9ec6-267a-2901-cf05fd133183}">
           <p14:sldIdLst>
             <p14:sldId id="256"/>
             <p14:sldId id="257"/>
@@ -138,7 +138,7 @@
             <p14:sldId id="262"/>
           </p14:sldIdLst>
         </p14:section>
-        <p14:section name="Block A" id="{26d436d8-76a1-6c00-dc73-936d5566c00e}">
+        <p14:section name="Block A" id="{c5872764-93a5-9f68-aa3f-8e121deb7bf4}">
           <p14:sldIdLst>
             <p14:sldId id="263"/>
             <p14:sldId id="264"/>
@@ -148,15 +148,15 @@
             <p14:sldId id="269"/>
           </p14:sldIdLst>
         </p14:section>
-        <p14:section name="Break" id="{503792a7-7458-d283-2ca0-3fd15432213f}">
+        <p14:section name="Break" id="{6d95d8fc-8f88-a48d-7f2a-57ad2da1cada}">
           <p14:sldIdLst>
             <p14:sldId id="267"/>
           </p14:sldIdLst>
         </p14:section>
-        <p14:section name="Block A" id="{bb2309d4-25be-8b3d-03e5-515851460496}">
+        <p14:section name="Block A" id="{e2b309cd-9eca-c8b5-337b-f495b9da11e7}">
           <p14:sldIdLst/>
         </p14:section>
-        <p14:section name="Block B" id="{d47c71b6-07bd-41fc-9d6a-71e3faadb9cc}">
+        <p14:section name="Block B" id="{563671c9-7f61-999d-ed0f-e67128e2647f}">
           <p14:sldIdLst>
             <p14:sldId id="270"/>
             <p14:sldId id="271"/>
@@ -164,7 +164,7 @@
             <p14:sldId id="273"/>
           </p14:sldIdLst>
         </p14:section>
-        <p14:section name="Make and close" id="{3f5570a8-817f-8e7f-c5a4-598eca165e51}">
+        <p14:section name="Make and close" id="{96940913-7173-e7ee-60c2-af29880d1a93}">
           <p14:sldIdLst>
             <p14:sldId id="274"/>
             <p14:sldId id="275"/>

--- a/Schools_ML_Track/camp_2026/slides/ML/ML13.pptx
+++ b/Schools_ML_Track/camp_2026/slides/ML/ML13.pptx
@@ -127,7 +127,7 @@
   <p:extLst>
     <p:ext uri="{521415D9-36F7-43E2-AB2F-B90AF26B5E84}">
       <p14:sectionLst xmlns:p14="http://schemas.microsoft.com/office/powerpoint/2010/main">
-        <p14:section name="Opening" id="{7bfb306d-9ec6-267a-2901-cf05fd133183}">
+        <p14:section name="Opening" id="{f211b2c7-5743-0038-c985-37ce39694d0b}">
           <p14:sldIdLst>
             <p14:sldId id="256"/>
             <p14:sldId id="257"/>
@@ -138,7 +138,7 @@
             <p14:sldId id="262"/>
           </p14:sldIdLst>
         </p14:section>
-        <p14:section name="Block A" id="{c5872764-93a5-9f68-aa3f-8e121deb7bf4}">
+        <p14:section name="Block A" id="{c14decac-a447-b704-f5dd-34a8b336b3ec}">
           <p14:sldIdLst>
             <p14:sldId id="263"/>
             <p14:sldId id="264"/>
@@ -148,15 +148,15 @@
             <p14:sldId id="269"/>
           </p14:sldIdLst>
         </p14:section>
-        <p14:section name="Break" id="{6d95d8fc-8f88-a48d-7f2a-57ad2da1cada}">
+        <p14:section name="Break" id="{547a2fbc-836e-c060-15e1-0280dc92139b}">
           <p14:sldIdLst>
             <p14:sldId id="267"/>
           </p14:sldIdLst>
         </p14:section>
-        <p14:section name="Block A" id="{e2b309cd-9eca-c8b5-337b-f495b9da11e7}">
+        <p14:section name="Block A" id="{7a2eb26f-579b-f33f-a5d4-9308702d0afc}">
           <p14:sldIdLst/>
         </p14:section>
-        <p14:section name="Block B" id="{563671c9-7f61-999d-ed0f-e67128e2647f}">
+        <p14:section name="Block B" id="{164fe194-93f8-21d6-f30d-25b86a56abad}">
           <p14:sldIdLst>
             <p14:sldId id="270"/>
             <p14:sldId id="271"/>
@@ -164,7 +164,7 @@
             <p14:sldId id="273"/>
           </p14:sldIdLst>
         </p14:section>
-        <p14:section name="Make and close" id="{96940913-7173-e7ee-60c2-af29880d1a93}">
+        <p14:section name="Make and close" id="{e85d6ea8-0779-48e3-5c36-63e9089ac664}">
           <p14:sldIdLst>
             <p14:sldId id="274"/>
             <p14:sldId id="275"/>
@@ -3105,7 +3105,24 @@
                 <a:ea typeface="Lato" pitchFamily="34" charset="-122"/>
                 <a:cs typeface="Lato" pitchFamily="34" charset="-120"/>
               </a:rPr>
-              <a:t>Features, targets and an honest baseline</a:t>
+              <a:t>Features, targets and</a:t>
+            </a:r>
+            <a:endParaRPr lang="en-US" sz="5600" dirty="0"/>
+          </a:p>
+          <a:p>
+            <a:pPr algn="l" indent="0" marL="0">
+              <a:buNone/>
+            </a:pPr>
+            <a:r>
+              <a:rPr lang="en-US" sz="5600" b="1" dirty="0">
+                <a:solidFill>
+                  <a:srgbClr val="FFFFFF"/>
+                </a:solidFill>
+                <a:latin typeface="Lato" pitchFamily="34" charset="0"/>
+                <a:ea typeface="Lato" pitchFamily="34" charset="-122"/>
+                <a:cs typeface="Lato" pitchFamily="34" charset="-120"/>
+              </a:rPr>
+              <a:t>an honest baseline</a:t>
             </a:r>
             <a:endParaRPr lang="en-US" sz="5600" dirty="0"/>
           </a:p>
@@ -5646,15 +5663,15 @@
           <a:p>
             <a:pPr algn="l" indent="0" marL="0">
               <a:lnSpc>
-                <a:spcPts val="3480"/>
+                <a:spcPts val="3240"/>
               </a:lnSpc>
               <a:spcAft>
-                <a:spcPts val="2520"/>
+                <a:spcPts val="2020"/>
               </a:spcAft>
               <a:buNone/>
             </a:pPr>
             <a:r>
-              <a:rPr lang="en-US" sz="2900" dirty="0">
+              <a:rPr lang="en-US" sz="2700" dirty="0">
                 <a:solidFill>
                   <a:srgbClr val="111111"/>
                 </a:solidFill>
@@ -5662,22 +5679,22 @@
                 <a:ea typeface="Lato" pitchFamily="34" charset="-122"/>
                 <a:cs typeface="Lato" pitchFamily="34" charset="-120"/>
               </a:rPr>
-              <a:t>For training values [2000, 4000, 6000], find the baseline guess for a new item. If its real value is 5000, calculate the absolute error. Name one leaked feature if you were predicting a selling price.</a:t>
-            </a:r>
-            <a:endParaRPr lang="en-US" sz="2900" dirty="0"/>
+              <a:t>For training values [2000, 4000, 6000], find the baseline guess for a new item.</a:t>
+            </a:r>
+            <a:endParaRPr lang="en-US" sz="2700" dirty="0"/>
           </a:p>
           <a:p>
             <a:pPr algn="l" indent="0" marL="0">
               <a:lnSpc>
-                <a:spcPts val="3480"/>
+                <a:spcPts val="3240"/>
               </a:lnSpc>
               <a:spcAft>
-                <a:spcPts val="2520"/>
+                <a:spcPts val="2020"/>
               </a:spcAft>
               <a:buNone/>
             </a:pPr>
             <a:r>
-              <a:rPr lang="en-US" sz="2900" dirty="0">
+              <a:rPr lang="en-US" sz="2700" dirty="0">
                 <a:solidFill>
                   <a:srgbClr val="111111"/>
                 </a:solidFill>
@@ -5685,9 +5702,55 @@
                 <a:ea typeface="Lato" pitchFamily="34" charset="-122"/>
                 <a:cs typeface="Lato" pitchFamily="34" charset="-120"/>
               </a:rPr>
+              <a:t>If its real value is 5000, calculate the absolute error.</a:t>
+            </a:r>
+            <a:endParaRPr lang="en-US" sz="2700" dirty="0"/>
+          </a:p>
+          <a:p>
+            <a:pPr algn="l" indent="0" marL="0">
+              <a:lnSpc>
+                <a:spcPts val="3240"/>
+              </a:lnSpc>
+              <a:spcAft>
+                <a:spcPts val="2020"/>
+              </a:spcAft>
+              <a:buNone/>
+            </a:pPr>
+            <a:r>
+              <a:rPr lang="en-US" sz="2700" dirty="0">
+                <a:solidFill>
+                  <a:srgbClr val="111111"/>
+                </a:solidFill>
+                <a:latin typeface="Lato" pitchFamily="34" charset="0"/>
+                <a:ea typeface="Lato" pitchFamily="34" charset="-122"/>
+                <a:cs typeface="Lato" pitchFamily="34" charset="-120"/>
+              </a:rPr>
+              <a:t>Name one leaked feature if you were predicting a selling price.</a:t>
+            </a:r>
+            <a:endParaRPr lang="en-US" sz="2700" dirty="0"/>
+          </a:p>
+          <a:p>
+            <a:pPr algn="l" indent="0" marL="0">
+              <a:lnSpc>
+                <a:spcPts val="3240"/>
+              </a:lnSpc>
+              <a:spcAft>
+                <a:spcPts val="2020"/>
+              </a:spcAft>
+              <a:buNone/>
+            </a:pPr>
+            <a:r>
+              <a:rPr lang="en-US" sz="2700" dirty="0">
+                <a:solidFill>
+                  <a:srgbClr val="111111"/>
+                </a:solidFill>
+                <a:latin typeface="Lato" pitchFamily="34" charset="0"/>
+                <a:ea typeface="Lato" pitchFamily="34" charset="-122"/>
+                <a:cs typeface="Lato" pitchFamily="34" charset="-120"/>
+              </a:rPr>
               <a:t>Save it as ML13. Write two sentences: what you changed and how you checked it.</a:t>
             </a:r>
-            <a:endParaRPr lang="en-US" sz="2900" dirty="0"/>
+            <a:endParaRPr lang="en-US" sz="2700" dirty="0"/>
           </a:p>
         </p:txBody>
       </p:sp>
